--- a/WK2Assgn_Adhikari_R_NURS6051.pptx
+++ b/WK2Assgn_Adhikari_R_NURS6051.pptx
@@ -5,18 +5,19 @@
     <p:sldMasterId id="2147483648" r:id="rId1"/>
   </p:sldMasterIdLst>
   <p:notesMasterIdLst>
-    <p:notesMasterId r:id="rId11"/>
+    <p:notesMasterId r:id="rId12"/>
   </p:notesMasterIdLst>
   <p:sldIdLst>
     <p:sldId id="264" r:id="rId2"/>
-    <p:sldId id="256" r:id="rId3"/>
-    <p:sldId id="257" r:id="rId4"/>
-    <p:sldId id="258" r:id="rId5"/>
-    <p:sldId id="259" r:id="rId6"/>
-    <p:sldId id="260" r:id="rId7"/>
-    <p:sldId id="261" r:id="rId8"/>
-    <p:sldId id="262" r:id="rId9"/>
-    <p:sldId id="263" r:id="rId10"/>
+    <p:sldId id="265" r:id="rId3"/>
+    <p:sldId id="256" r:id="rId4"/>
+    <p:sldId id="257" r:id="rId5"/>
+    <p:sldId id="258" r:id="rId6"/>
+    <p:sldId id="259" r:id="rId7"/>
+    <p:sldId id="260" r:id="rId8"/>
+    <p:sldId id="261" r:id="rId9"/>
+    <p:sldId id="262" r:id="rId10"/>
+    <p:sldId id="263" r:id="rId11"/>
   </p:sldIdLst>
   <p:sldSz cx="12192000" cy="6858000"/>
   <p:notesSz cx="6858000" cy="9144000"/>
@@ -10828,7 +10829,7 @@
           <a:p>
             <a:fld id="{10555AAD-9460-5F4B-B885-6486241F6A16}" type="datetimeFigureOut">
               <a:rPr lang="en-US" smtClean="0"/>
-              <a:t>6/15/23</a:t>
+              <a:t>8/7/25</a:t>
             </a:fld>
             <a:endParaRPr lang="en-US"/>
           </a:p>
@@ -11218,7 +11219,7 @@
           <a:p>
             <a:fld id="{1CC7C6B7-14E3-FF4F-BA25-FB13D19B7EBB}" type="slidenum">
               <a:rPr lang="en-US" smtClean="0"/>
-              <a:t>3</a:t>
+              <a:t>4</a:t>
             </a:fld>
             <a:endParaRPr lang="en-US"/>
           </a:p>
@@ -11399,7 +11400,7 @@
           <a:p>
             <a:fld id="{1CC7C6B7-14E3-FF4F-BA25-FB13D19B7EBB}" type="slidenum">
               <a:rPr lang="en-US" smtClean="0"/>
-              <a:t>4</a:t>
+              <a:t>5</a:t>
             </a:fld>
             <a:endParaRPr lang="en-US"/>
           </a:p>
@@ -11541,7 +11542,7 @@
           <a:p>
             <a:fld id="{1CC7C6B7-14E3-FF4F-BA25-FB13D19B7EBB}" type="slidenum">
               <a:rPr lang="en-US" smtClean="0"/>
-              <a:t>5</a:t>
+              <a:t>6</a:t>
             </a:fld>
             <a:endParaRPr lang="en-US"/>
           </a:p>
@@ -11707,7 +11708,7 @@
           <a:p>
             <a:fld id="{7973A04A-FA3B-374E-A42C-293CFDACBB1D}" type="datetimeFigureOut">
               <a:rPr lang="en-US" smtClean="0"/>
-              <a:t>6/15/23</a:t>
+              <a:t>8/7/25</a:t>
             </a:fld>
             <a:endParaRPr lang="en-US"/>
           </a:p>
@@ -11905,7 +11906,7 @@
           <a:p>
             <a:fld id="{7973A04A-FA3B-374E-A42C-293CFDACBB1D}" type="datetimeFigureOut">
               <a:rPr lang="en-US" smtClean="0"/>
-              <a:t>6/15/23</a:t>
+              <a:t>8/7/25</a:t>
             </a:fld>
             <a:endParaRPr lang="en-US"/>
           </a:p>
@@ -12113,7 +12114,7 @@
           <a:p>
             <a:fld id="{7973A04A-FA3B-374E-A42C-293CFDACBB1D}" type="datetimeFigureOut">
               <a:rPr lang="en-US" smtClean="0"/>
-              <a:t>6/15/23</a:t>
+              <a:t>8/7/25</a:t>
             </a:fld>
             <a:endParaRPr lang="en-US"/>
           </a:p>
@@ -12311,7 +12312,7 @@
           <a:p>
             <a:fld id="{7973A04A-FA3B-374E-A42C-293CFDACBB1D}" type="datetimeFigureOut">
               <a:rPr lang="en-US" smtClean="0"/>
-              <a:t>6/15/23</a:t>
+              <a:t>8/7/25</a:t>
             </a:fld>
             <a:endParaRPr lang="en-US"/>
           </a:p>
@@ -12586,7 +12587,7 @@
           <a:p>
             <a:fld id="{7973A04A-FA3B-374E-A42C-293CFDACBB1D}" type="datetimeFigureOut">
               <a:rPr lang="en-US" smtClean="0"/>
-              <a:t>6/15/23</a:t>
+              <a:t>8/7/25</a:t>
             </a:fld>
             <a:endParaRPr lang="en-US"/>
           </a:p>
@@ -12851,7 +12852,7 @@
           <a:p>
             <a:fld id="{7973A04A-FA3B-374E-A42C-293CFDACBB1D}" type="datetimeFigureOut">
               <a:rPr lang="en-US" smtClean="0"/>
-              <a:t>6/15/23</a:t>
+              <a:t>8/7/25</a:t>
             </a:fld>
             <a:endParaRPr lang="en-US"/>
           </a:p>
@@ -13263,7 +13264,7 @@
           <a:p>
             <a:fld id="{7973A04A-FA3B-374E-A42C-293CFDACBB1D}" type="datetimeFigureOut">
               <a:rPr lang="en-US" smtClean="0"/>
-              <a:t>6/15/23</a:t>
+              <a:t>8/7/25</a:t>
             </a:fld>
             <a:endParaRPr lang="en-US"/>
           </a:p>
@@ -13404,7 +13405,7 @@
           <a:p>
             <a:fld id="{7973A04A-FA3B-374E-A42C-293CFDACBB1D}" type="datetimeFigureOut">
               <a:rPr lang="en-US" smtClean="0"/>
-              <a:t>6/15/23</a:t>
+              <a:t>8/7/25</a:t>
             </a:fld>
             <a:endParaRPr lang="en-US"/>
           </a:p>
@@ -13517,7 +13518,7 @@
           <a:p>
             <a:fld id="{7973A04A-FA3B-374E-A42C-293CFDACBB1D}" type="datetimeFigureOut">
               <a:rPr lang="en-US" smtClean="0"/>
-              <a:t>6/15/23</a:t>
+              <a:t>8/7/25</a:t>
             </a:fld>
             <a:endParaRPr lang="en-US"/>
           </a:p>
@@ -13828,7 +13829,7 @@
           <a:p>
             <a:fld id="{7973A04A-FA3B-374E-A42C-293CFDACBB1D}" type="datetimeFigureOut">
               <a:rPr lang="en-US" smtClean="0"/>
-              <a:t>6/15/23</a:t>
+              <a:t>8/7/25</a:t>
             </a:fld>
             <a:endParaRPr lang="en-US"/>
           </a:p>
@@ -14116,7 +14117,7 @@
           <a:p>
             <a:fld id="{7973A04A-FA3B-374E-A42C-293CFDACBB1D}" type="datetimeFigureOut">
               <a:rPr lang="en-US" smtClean="0"/>
-              <a:t>6/15/23</a:t>
+              <a:t>8/7/25</a:t>
             </a:fld>
             <a:endParaRPr lang="en-US"/>
           </a:p>
@@ -14357,7 +14358,7 @@
           <a:p>
             <a:fld id="{7973A04A-FA3B-374E-A42C-293CFDACBB1D}" type="datetimeFigureOut">
               <a:rPr lang="en-US" smtClean="0"/>
-              <a:t>6/15/23</a:t>
+              <a:t>8/7/25</a:t>
             </a:fld>
             <a:endParaRPr lang="en-US"/>
           </a:p>
@@ -16047,7 +16048,697 @@
 </p:sld>
 </file>
 
+<file path=ppt/slides/slide10.xml><?xml version="1.0" encoding="utf-8"?>
+<p:sld xmlns:a="http://schemas.openxmlformats.org/drawingml/2006/main" xmlns:r="http://schemas.openxmlformats.org/officeDocument/2006/relationships" xmlns:p="http://schemas.openxmlformats.org/presentationml/2006/main">
+  <p:cSld>
+    <p:bg>
+      <p:bgPr>
+        <a:solidFill>
+          <a:schemeClr val="bg1"/>
+        </a:solidFill>
+        <a:effectLst/>
+      </p:bgPr>
+    </p:bg>
+    <p:spTree>
+      <p:nvGrpSpPr>
+        <p:cNvPr id="1" name=""/>
+        <p:cNvGrpSpPr/>
+        <p:nvPr/>
+      </p:nvGrpSpPr>
+      <p:grpSpPr>
+        <a:xfrm>
+          <a:off x="0" y="0"/>
+          <a:ext cx="0" cy="0"/>
+          <a:chOff x="0" y="0"/>
+          <a:chExt cx="0" cy="0"/>
+        </a:xfrm>
+      </p:grpSpPr>
+      <p:sp>
+        <p:nvSpPr>
+          <p:cNvPr id="8" name="Rectangle 7">
+            <a:extLst>
+              <a:ext uri="{FF2B5EF4-FFF2-40B4-BE49-F238E27FC236}">
+                <a16:creationId xmlns:a16="http://schemas.microsoft.com/office/drawing/2014/main" id="{DE7FFD28-545C-4C88-A2E7-152FB234C92C}"/>
+              </a:ext>
+              <a:ext uri="{C183D7F6-B498-43B3-948B-1728B52AA6E4}">
+                <adec:decorative xmlns:adec="http://schemas.microsoft.com/office/drawing/2017/decorative" val="1"/>
+              </a:ext>
+            </a:extLst>
+          </p:cNvPr>
+          <p:cNvSpPr>
+            <a:spLocks noGrp="1" noRot="1" noChangeAspect="1" noMove="1" noResize="1" noEditPoints="1" noAdjustHandles="1" noChangeArrowheads="1" noChangeShapeType="1" noTextEdit="1"/>
+          </p:cNvSpPr>
+          <p:nvPr>
+            <p:extLst>
+              <p:ext uri="{386F3935-93C4-4BCD-93E2-E3B085C9AB24}">
+                <p16:designElem xmlns:p16="http://schemas.microsoft.com/office/powerpoint/2015/main" val="1"/>
+              </p:ext>
+            </p:extLst>
+          </p:nvPr>
+        </p:nvSpPr>
+        <p:spPr>
+          <a:xfrm>
+            <a:off x="546100" y="349250"/>
+            <a:ext cx="11099800" cy="1803400"/>
+          </a:xfrm>
+          <a:prstGeom prst="rect">
+            <a:avLst/>
+          </a:prstGeom>
+          <a:solidFill>
+            <a:schemeClr val="accent5"/>
+          </a:solidFill>
+          <a:ln>
+            <a:noFill/>
+          </a:ln>
+        </p:spPr>
+        <p:style>
+          <a:lnRef idx="2">
+            <a:schemeClr val="accent1">
+              <a:shade val="50000"/>
+            </a:schemeClr>
+          </a:lnRef>
+          <a:fillRef idx="1">
+            <a:schemeClr val="accent1"/>
+          </a:fillRef>
+          <a:effectRef idx="0">
+            <a:schemeClr val="accent1"/>
+          </a:effectRef>
+          <a:fontRef idx="minor">
+            <a:schemeClr val="lt1"/>
+          </a:fontRef>
+        </p:style>
+        <p:txBody>
+          <a:bodyPr rtlCol="0" anchor="ctr"/>
+          <a:lstStyle/>
+          <a:p>
+            <a:pPr algn="ctr"/>
+            <a:endParaRPr lang="en-US"/>
+          </a:p>
+        </p:txBody>
+      </p:sp>
+      <p:sp>
+        <p:nvSpPr>
+          <p:cNvPr id="2" name="Title 1">
+            <a:extLst>
+              <a:ext uri="{FF2B5EF4-FFF2-40B4-BE49-F238E27FC236}">
+                <a16:creationId xmlns:a16="http://schemas.microsoft.com/office/drawing/2014/main" id="{7F593DFB-F021-EB02-8B06-56A4CCD29D6E}"/>
+              </a:ext>
+            </a:extLst>
+          </p:cNvPr>
+          <p:cNvSpPr>
+            <a:spLocks noGrp="1"/>
+          </p:cNvSpPr>
+          <p:nvPr>
+            <p:ph type="title"/>
+          </p:nvPr>
+        </p:nvSpPr>
+        <p:spPr>
+          <a:xfrm>
+            <a:off x="838200" y="588168"/>
+            <a:ext cx="10515600" cy="1325563"/>
+          </a:xfrm>
+        </p:spPr>
+        <p:txBody>
+          <a:bodyPr>
+            <a:normAutofit/>
+          </a:bodyPr>
+          <a:lstStyle/>
+          <a:p>
+            <a:pPr algn="ctr"/>
+            <a:r>
+              <a:rPr lang="en-US" sz="4600">
+                <a:solidFill>
+                  <a:srgbClr val="FFFFFF"/>
+                </a:solidFill>
+              </a:rPr>
+              <a:t>References</a:t>
+            </a:r>
+          </a:p>
+        </p:txBody>
+      </p:sp>
+      <p:sp>
+        <p:nvSpPr>
+          <p:cNvPr id="3" name="Content Placeholder 2">
+            <a:extLst>
+              <a:ext uri="{FF2B5EF4-FFF2-40B4-BE49-F238E27FC236}">
+                <a16:creationId xmlns:a16="http://schemas.microsoft.com/office/drawing/2014/main" id="{2A07DAD5-20DD-D02F-7EE5-A8A3B3267B52}"/>
+              </a:ext>
+            </a:extLst>
+          </p:cNvPr>
+          <p:cNvSpPr>
+            <a:spLocks noGrp="1"/>
+          </p:cNvSpPr>
+          <p:nvPr>
+            <p:ph idx="1"/>
+          </p:nvPr>
+        </p:nvSpPr>
+        <p:spPr>
+          <a:xfrm>
+            <a:off x="838200" y="2391568"/>
+            <a:ext cx="11099800" cy="4466432"/>
+          </a:xfrm>
+        </p:spPr>
+        <p:txBody>
+          <a:bodyPr anchor="ctr">
+            <a:normAutofit/>
+          </a:bodyPr>
+          <a:lstStyle/>
+          <a:p>
+            <a:pPr marL="0" marR="0" indent="0">
+              <a:spcBef>
+                <a:spcPts val="0"/>
+              </a:spcBef>
+              <a:spcAft>
+                <a:spcPts val="0"/>
+              </a:spcAft>
+              <a:buNone/>
+            </a:pPr>
+            <a:r>
+              <a:rPr lang="en-US" sz="1300" dirty="0">
+                <a:effectLst/>
+                <a:latin typeface="Times New Roman" panose="02020603050405020304" pitchFamily="18" charset="0"/>
+                <a:ea typeface="Calibri" panose="020F0502020204030204" pitchFamily="34" charset="0"/>
+                <a:cs typeface="Times New Roman" panose="02020603050405020304" pitchFamily="18" charset="0"/>
+              </a:rPr>
+              <a:t>Admin. (2022, June 29). </a:t>
+            </a:r>
+            <a:r>
+              <a:rPr lang="en-US" sz="1300" i="1" dirty="0">
+                <a:effectLst/>
+                <a:latin typeface="Times New Roman" panose="02020603050405020304" pitchFamily="18" charset="0"/>
+                <a:ea typeface="Calibri" panose="020F0502020204030204" pitchFamily="34" charset="0"/>
+                <a:cs typeface="Times New Roman" panose="02020603050405020304" pitchFamily="18" charset="0"/>
+              </a:rPr>
+              <a:t>What is Nursing Informatics?</a:t>
+            </a:r>
+            <a:r>
+              <a:rPr lang="en-US" sz="1300" dirty="0">
+                <a:effectLst/>
+                <a:latin typeface="Times New Roman" panose="02020603050405020304" pitchFamily="18" charset="0"/>
+                <a:ea typeface="Calibri" panose="020F0502020204030204" pitchFamily="34" charset="0"/>
+                <a:cs typeface="Times New Roman" panose="02020603050405020304" pitchFamily="18" charset="0"/>
+              </a:rPr>
+              <a:t> HIMSS. Retrieved December 11, 2022, from </a:t>
+            </a:r>
+            <a:r>
+              <a:rPr lang="en-US" sz="1300" u="sng" dirty="0">
+                <a:effectLst/>
+                <a:latin typeface="Times New Roman" panose="02020603050405020304" pitchFamily="18" charset="0"/>
+                <a:ea typeface="Calibri" panose="020F0502020204030204" pitchFamily="34" charset="0"/>
+                <a:cs typeface="Times New Roman" panose="02020603050405020304" pitchFamily="18" charset="0"/>
+                <a:hlinkClick r:id="rId2"/>
+              </a:rPr>
+              <a:t>https://www.himss.org/resources/what-nursing-informatics</a:t>
+            </a:r>
+            <a:endParaRPr lang="en-US" sz="1300" u="sng" dirty="0">
+              <a:effectLst/>
+              <a:latin typeface="Times New Roman" panose="02020603050405020304" pitchFamily="18" charset="0"/>
+              <a:ea typeface="Calibri" panose="020F0502020204030204" pitchFamily="34" charset="0"/>
+              <a:cs typeface="Times New Roman" panose="02020603050405020304" pitchFamily="18" charset="0"/>
+            </a:endParaRPr>
+          </a:p>
+          <a:p>
+            <a:pPr marL="0" marR="0" indent="0">
+              <a:spcBef>
+                <a:spcPts val="0"/>
+              </a:spcBef>
+              <a:spcAft>
+                <a:spcPts val="0"/>
+              </a:spcAft>
+              <a:buNone/>
+            </a:pPr>
+            <a:endParaRPr lang="en-US" sz="1300" u="sng" dirty="0">
+              <a:effectLst/>
+              <a:latin typeface="Times New Roman" panose="02020603050405020304" pitchFamily="18" charset="0"/>
+              <a:ea typeface="Calibri" panose="020F0502020204030204" pitchFamily="34" charset="0"/>
+              <a:cs typeface="Times New Roman" panose="02020603050405020304" pitchFamily="18" charset="0"/>
+            </a:endParaRPr>
+          </a:p>
+          <a:p>
+            <a:pPr marL="0" marR="0" indent="0">
+              <a:spcBef>
+                <a:spcPts val="0"/>
+              </a:spcBef>
+              <a:spcAft>
+                <a:spcPts val="0"/>
+              </a:spcAft>
+              <a:buNone/>
+            </a:pPr>
+            <a:endParaRPr lang="en-US" sz="1300" dirty="0">
+              <a:effectLst/>
+              <a:latin typeface="Calibri" panose="020F0502020204030204" pitchFamily="34" charset="0"/>
+              <a:ea typeface="Calibri" panose="020F0502020204030204" pitchFamily="34" charset="0"/>
+              <a:cs typeface="Times New Roman" panose="02020603050405020304" pitchFamily="18" charset="0"/>
+            </a:endParaRPr>
+          </a:p>
+          <a:p>
+            <a:pPr marL="0" marR="0" indent="0">
+              <a:spcBef>
+                <a:spcPts val="0"/>
+              </a:spcBef>
+              <a:spcAft>
+                <a:spcPts val="0"/>
+              </a:spcAft>
+              <a:buNone/>
+            </a:pPr>
+            <a:r>
+              <a:rPr lang="en-US" sz="1300" dirty="0">
+                <a:effectLst/>
+                <a:latin typeface="Times New Roman" panose="02020603050405020304" pitchFamily="18" charset="0"/>
+                <a:ea typeface="Calibri" panose="020F0502020204030204" pitchFamily="34" charset="0"/>
+                <a:cs typeface="Times New Roman" panose="02020603050405020304" pitchFamily="18" charset="0"/>
+              </a:rPr>
+              <a:t>American Nurses Association. (2001). Scope and Standards of Nursing Informatics Practice. Washington, DC: American Nurses Publishing.</a:t>
+            </a:r>
+          </a:p>
+          <a:p>
+            <a:pPr marL="0" marR="0" indent="0">
+              <a:spcBef>
+                <a:spcPts val="0"/>
+              </a:spcBef>
+              <a:spcAft>
+                <a:spcPts val="0"/>
+              </a:spcAft>
+              <a:buNone/>
+            </a:pPr>
+            <a:endParaRPr lang="en-US" sz="1300" dirty="0">
+              <a:effectLst/>
+              <a:latin typeface="Calibri" panose="020F0502020204030204" pitchFamily="34" charset="0"/>
+              <a:ea typeface="Calibri" panose="020F0502020204030204" pitchFamily="34" charset="0"/>
+              <a:cs typeface="Times New Roman" panose="02020603050405020304" pitchFamily="18" charset="0"/>
+            </a:endParaRPr>
+          </a:p>
+          <a:p>
+            <a:pPr marL="0" marR="0" indent="0">
+              <a:buNone/>
+            </a:pPr>
+            <a:r>
+              <a:rPr lang="en-US" sz="1300" dirty="0" err="1">
+                <a:effectLst/>
+                <a:latin typeface="Times New Roman" panose="02020603050405020304" pitchFamily="18" charset="0"/>
+                <a:ea typeface="Times New Roman" panose="02020603050405020304" pitchFamily="18" charset="0"/>
+              </a:rPr>
+              <a:t>Conrrad</a:t>
+            </a:r>
+            <a:r>
+              <a:rPr lang="en-US" sz="1300" dirty="0">
+                <a:effectLst/>
+                <a:latin typeface="Times New Roman" panose="02020603050405020304" pitchFamily="18" charset="0"/>
+                <a:ea typeface="Times New Roman" panose="02020603050405020304" pitchFamily="18" charset="0"/>
+              </a:rPr>
+              <a:t>, S., &amp; Sherrod, D. (n.d.). </a:t>
+            </a:r>
+            <a:r>
+              <a:rPr lang="en-US" sz="1300" i="1" dirty="0">
+                <a:effectLst/>
+                <a:latin typeface="Times New Roman" panose="02020603050405020304" pitchFamily="18" charset="0"/>
+                <a:ea typeface="Times New Roman" panose="02020603050405020304" pitchFamily="18" charset="0"/>
+              </a:rPr>
+              <a:t>Nurse managers as Knowledge Workers : Nursing Management</a:t>
+            </a:r>
+            <a:r>
+              <a:rPr lang="en-US" sz="1300" dirty="0">
+                <a:effectLst/>
+                <a:latin typeface="Times New Roman" panose="02020603050405020304" pitchFamily="18" charset="0"/>
+                <a:ea typeface="Times New Roman" panose="02020603050405020304" pitchFamily="18" charset="0"/>
+              </a:rPr>
+              <a:t>. Nurse managers as knowledge worker. Retrieved December 8, 2022, from   </a:t>
+            </a:r>
+            <a:r>
+              <a:rPr lang="en-US" sz="1300" u="sng" dirty="0">
+                <a:effectLst/>
+                <a:latin typeface="Times New Roman" panose="02020603050405020304" pitchFamily="18" charset="0"/>
+                <a:ea typeface="Times New Roman" panose="02020603050405020304" pitchFamily="18" charset="0"/>
+                <a:hlinkClick r:id="rId3"/>
+              </a:rPr>
+              <a:t>https://journals.lww.com/nursingmanagement/fulltext/2011/02000/Nurse_managers_as_knowledge_workers.14.aspx</a:t>
+            </a:r>
+            <a:r>
+              <a:rPr lang="en-US" sz="1300" dirty="0">
+                <a:effectLst/>
+                <a:latin typeface="Times New Roman" panose="02020603050405020304" pitchFamily="18" charset="0"/>
+                <a:ea typeface="Times New Roman" panose="02020603050405020304" pitchFamily="18" charset="0"/>
+              </a:rPr>
+              <a:t> </a:t>
+            </a:r>
+          </a:p>
+          <a:p>
+            <a:pPr marL="0" marR="0" indent="0">
+              <a:spcBef>
+                <a:spcPts val="0"/>
+              </a:spcBef>
+              <a:spcAft>
+                <a:spcPts val="0"/>
+              </a:spcAft>
+              <a:buNone/>
+            </a:pPr>
+            <a:endParaRPr lang="en-US" sz="1300" dirty="0">
+              <a:effectLst/>
+              <a:latin typeface="Calibri" panose="020F0502020204030204" pitchFamily="34" charset="0"/>
+              <a:ea typeface="Calibri" panose="020F0502020204030204" pitchFamily="34" charset="0"/>
+              <a:cs typeface="Times New Roman" panose="02020603050405020304" pitchFamily="18" charset="0"/>
+            </a:endParaRPr>
+          </a:p>
+          <a:p>
+            <a:pPr marL="0" marR="0" indent="0">
+              <a:buNone/>
+            </a:pPr>
+            <a:r>
+              <a:rPr lang="en-US" sz="1300" i="1" dirty="0">
+                <a:effectLst/>
+                <a:latin typeface="Times New Roman" panose="02020603050405020304" pitchFamily="18" charset="0"/>
+                <a:ea typeface="Times New Roman" panose="02020603050405020304" pitchFamily="18" charset="0"/>
+              </a:rPr>
+              <a:t>How nursing informatics benefits quality outcomes</a:t>
+            </a:r>
+            <a:r>
+              <a:rPr lang="en-US" sz="1300" dirty="0">
+                <a:effectLst/>
+                <a:latin typeface="Times New Roman" panose="02020603050405020304" pitchFamily="18" charset="0"/>
+                <a:ea typeface="Times New Roman" panose="02020603050405020304" pitchFamily="18" charset="0"/>
+              </a:rPr>
+              <a:t>. Default. (2021, April 1). Retrieved December 8, 2022, from </a:t>
+            </a:r>
+            <a:r>
+              <a:rPr lang="en-US" sz="1300" u="sng" dirty="0">
+                <a:effectLst/>
+                <a:latin typeface="Times New Roman" panose="02020603050405020304" pitchFamily="18" charset="0"/>
+                <a:ea typeface="Times New Roman" panose="02020603050405020304" pitchFamily="18" charset="0"/>
+                <a:hlinkClick r:id="rId4"/>
+              </a:rPr>
+              <a:t>https://www.healthstream.com/resource/blog/how-nursing-informatics-benefits-quality-outcomes</a:t>
+            </a:r>
+            <a:r>
+              <a:rPr lang="en-US" sz="1300" dirty="0">
+                <a:effectLst/>
+                <a:latin typeface="Times New Roman" panose="02020603050405020304" pitchFamily="18" charset="0"/>
+                <a:ea typeface="Times New Roman" panose="02020603050405020304" pitchFamily="18" charset="0"/>
+              </a:rPr>
+              <a:t>  </a:t>
+            </a:r>
+          </a:p>
+          <a:p>
+            <a:pPr marL="0" marR="0" indent="0">
+              <a:buNone/>
+            </a:pPr>
+            <a:endParaRPr lang="en-US" sz="1300" dirty="0">
+              <a:effectLst/>
+              <a:latin typeface="Times New Roman" panose="02020603050405020304" pitchFamily="18" charset="0"/>
+              <a:ea typeface="Times New Roman" panose="02020603050405020304" pitchFamily="18" charset="0"/>
+            </a:endParaRPr>
+          </a:p>
+          <a:p>
+            <a:pPr marL="0" marR="0" indent="0">
+              <a:buNone/>
+            </a:pPr>
+            <a:r>
+              <a:rPr lang="en-US" sz="1300" dirty="0">
+                <a:effectLst/>
+                <a:latin typeface="Times New Roman" panose="02020603050405020304" pitchFamily="18" charset="0"/>
+                <a:ea typeface="Times New Roman" panose="02020603050405020304" pitchFamily="18" charset="0"/>
+              </a:rPr>
+              <a:t>McGonigle, D., &amp; Mastrian, K. (2022). Nursing Science an of Knowledge. In </a:t>
+            </a:r>
+            <a:r>
+              <a:rPr lang="en-US" sz="1300" i="1" dirty="0">
+                <a:effectLst/>
+                <a:latin typeface="Times New Roman" panose="02020603050405020304" pitchFamily="18" charset="0"/>
+                <a:ea typeface="Times New Roman" panose="02020603050405020304" pitchFamily="18" charset="0"/>
+              </a:rPr>
+              <a:t>Nursing Informatics and the foundation of knowledge</a:t>
+            </a:r>
+            <a:r>
+              <a:rPr lang="en-US" sz="1300" dirty="0">
+                <a:effectLst/>
+                <a:latin typeface="Times New Roman" panose="02020603050405020304" pitchFamily="18" charset="0"/>
+                <a:ea typeface="Times New Roman" panose="02020603050405020304" pitchFamily="18" charset="0"/>
+              </a:rPr>
+              <a:t> (pp. 15–16). essay, Jones &amp; Bartlett Learning. </a:t>
+            </a:r>
+          </a:p>
+          <a:p>
+            <a:pPr marL="0" marR="0" indent="0">
+              <a:buNone/>
+            </a:pPr>
+            <a:endParaRPr lang="en-US" sz="1300" dirty="0">
+              <a:effectLst/>
+              <a:latin typeface="Times New Roman" panose="02020603050405020304" pitchFamily="18" charset="0"/>
+              <a:ea typeface="Times New Roman" panose="02020603050405020304" pitchFamily="18" charset="0"/>
+            </a:endParaRPr>
+          </a:p>
+          <a:p>
+            <a:pPr marL="0" marR="0" indent="0">
+              <a:buNone/>
+            </a:pPr>
+            <a:r>
+              <a:rPr lang="en-US" sz="1300" dirty="0">
+                <a:effectLst/>
+                <a:latin typeface="Times New Roman" panose="02020603050405020304" pitchFamily="18" charset="0"/>
+                <a:ea typeface="Times New Roman" panose="02020603050405020304" pitchFamily="18" charset="0"/>
+              </a:rPr>
+              <a:t> Sweeney, </a:t>
+            </a:r>
+            <a:r>
+              <a:rPr lang="en-US" sz="1300" dirty="0" err="1">
+                <a:effectLst/>
+                <a:latin typeface="Times New Roman" panose="02020603050405020304" pitchFamily="18" charset="0"/>
+                <a:ea typeface="Times New Roman" panose="02020603050405020304" pitchFamily="18" charset="0"/>
+              </a:rPr>
+              <a:t>julianne</a:t>
+            </a:r>
+            <a:r>
+              <a:rPr lang="en-US" sz="1300" dirty="0">
+                <a:effectLst/>
+                <a:latin typeface="Times New Roman" panose="02020603050405020304" pitchFamily="18" charset="0"/>
+                <a:ea typeface="Times New Roman" panose="02020603050405020304" pitchFamily="18" charset="0"/>
+              </a:rPr>
+              <a:t>. (2017). </a:t>
+            </a:r>
+            <a:r>
+              <a:rPr lang="en-US" sz="1300" i="1" dirty="0">
+                <a:effectLst/>
+                <a:latin typeface="Times New Roman" panose="02020603050405020304" pitchFamily="18" charset="0"/>
+                <a:ea typeface="Times New Roman" panose="02020603050405020304" pitchFamily="18" charset="0"/>
+              </a:rPr>
+              <a:t>Healthcare Informatics</a:t>
+            </a:r>
+            <a:r>
+              <a:rPr lang="en-US" sz="1300" dirty="0">
+                <a:effectLst/>
+                <a:latin typeface="Times New Roman" panose="02020603050405020304" pitchFamily="18" charset="0"/>
+                <a:ea typeface="Times New Roman" panose="02020603050405020304" pitchFamily="18" charset="0"/>
+              </a:rPr>
+              <a:t>. EBSCO Information Services, Inc. | www.ebsco.com. Retrieved December 10, 2022, from </a:t>
+            </a:r>
+          </a:p>
+          <a:p>
+            <a:pPr marL="0" marR="0" indent="0">
+              <a:buNone/>
+            </a:pPr>
+            <a:r>
+              <a:rPr lang="en-US" sz="1300" u="sng" dirty="0">
+                <a:effectLst/>
+                <a:latin typeface="Times New Roman" panose="02020603050405020304" pitchFamily="18" charset="0"/>
+                <a:ea typeface="Times New Roman" panose="02020603050405020304" pitchFamily="18" charset="0"/>
+                <a:hlinkClick r:id="rId5"/>
+              </a:rPr>
+              <a:t>https://www.ebsco.com/products/ebscohost-research-platform</a:t>
+            </a:r>
+            <a:r>
+              <a:rPr lang="en-US" sz="1300" dirty="0">
+                <a:effectLst/>
+                <a:latin typeface="Times New Roman" panose="02020603050405020304" pitchFamily="18" charset="0"/>
+                <a:ea typeface="Times New Roman" panose="02020603050405020304" pitchFamily="18" charset="0"/>
+              </a:rPr>
+              <a:t> </a:t>
+            </a:r>
+          </a:p>
+        </p:txBody>
+      </p:sp>
+    </p:spTree>
+    <p:extLst>
+      <p:ext uri="{BB962C8B-B14F-4D97-AF65-F5344CB8AC3E}">
+        <p14:creationId xmlns:p14="http://schemas.microsoft.com/office/powerpoint/2010/main" val="303130201"/>
+      </p:ext>
+    </p:extLst>
+  </p:cSld>
+  <p:clrMapOvr>
+    <a:masterClrMapping/>
+  </p:clrMapOvr>
+</p:sld>
+</file>
+
 <file path=ppt/slides/slide2.xml><?xml version="1.0" encoding="utf-8"?>
+<p:sld xmlns:a="http://schemas.openxmlformats.org/drawingml/2006/main" xmlns:r="http://schemas.openxmlformats.org/officeDocument/2006/relationships" xmlns:p="http://schemas.openxmlformats.org/presentationml/2006/main">
+  <p:cSld>
+    <p:spTree>
+      <p:nvGrpSpPr>
+        <p:cNvPr id="1" name=""/>
+        <p:cNvGrpSpPr/>
+        <p:nvPr/>
+      </p:nvGrpSpPr>
+      <p:grpSpPr>
+        <a:xfrm>
+          <a:off x="0" y="0"/>
+          <a:ext cx="0" cy="0"/>
+          <a:chOff x="0" y="0"/>
+          <a:chExt cx="0" cy="0"/>
+        </a:xfrm>
+      </p:grpSpPr>
+      <p:sp>
+        <p:nvSpPr>
+          <p:cNvPr id="2" name="Title 1">
+            <a:extLst>
+              <a:ext uri="{FF2B5EF4-FFF2-40B4-BE49-F238E27FC236}">
+                <a16:creationId xmlns:a16="http://schemas.microsoft.com/office/drawing/2014/main" id="{42DCF237-F62C-390F-4DC3-F5C6C6F5617A}"/>
+              </a:ext>
+            </a:extLst>
+          </p:cNvPr>
+          <p:cNvSpPr>
+            <a:spLocks noGrp="1"/>
+          </p:cNvSpPr>
+          <p:nvPr>
+            <p:ph type="title"/>
+          </p:nvPr>
+        </p:nvSpPr>
+        <p:spPr/>
+        <p:txBody>
+          <a:bodyPr>
+            <a:normAutofit/>
+          </a:bodyPr>
+          <a:lstStyle/>
+          <a:p>
+            <a:r>
+              <a:rPr lang="en-US" sz="3200" b="0" i="0" cap="all" dirty="0">
+                <a:effectLst/>
+                <a:latin typeface="Times New Roman" panose="02020603050405020304" pitchFamily="18" charset="0"/>
+                <a:cs typeface="Times New Roman" panose="02020603050405020304" pitchFamily="18" charset="0"/>
+              </a:rPr>
+              <a:t>The Nurse Leader as Knowledge Worker</a:t>
+            </a:r>
+            <a:br>
+              <a:rPr lang="en-US" sz="3200" b="0" i="0" cap="all" dirty="0">
+                <a:effectLst/>
+                <a:latin typeface="Times New Roman" panose="02020603050405020304" pitchFamily="18" charset="0"/>
+                <a:cs typeface="Times New Roman" panose="02020603050405020304" pitchFamily="18" charset="0"/>
+              </a:rPr>
+            </a:br>
+            <a:endParaRPr lang="en-US" sz="3200" dirty="0">
+              <a:latin typeface="Times New Roman" panose="02020603050405020304" pitchFamily="18" charset="0"/>
+              <a:cs typeface="Times New Roman" panose="02020603050405020304" pitchFamily="18" charset="0"/>
+            </a:endParaRPr>
+          </a:p>
+        </p:txBody>
+      </p:sp>
+      <p:sp>
+        <p:nvSpPr>
+          <p:cNvPr id="3" name="Content Placeholder 2">
+            <a:extLst>
+              <a:ext uri="{FF2B5EF4-FFF2-40B4-BE49-F238E27FC236}">
+                <a16:creationId xmlns:a16="http://schemas.microsoft.com/office/drawing/2014/main" id="{12EC7D2B-4599-A93F-58D8-8F5678A2C9D9}"/>
+              </a:ext>
+            </a:extLst>
+          </p:cNvPr>
+          <p:cNvSpPr>
+            <a:spLocks noGrp="1"/>
+          </p:cNvSpPr>
+          <p:nvPr>
+            <p:ph idx="1"/>
+          </p:nvPr>
+        </p:nvSpPr>
+        <p:spPr/>
+        <p:txBody>
+          <a:bodyPr>
+            <a:normAutofit/>
+          </a:bodyPr>
+          <a:lstStyle/>
+          <a:p>
+            <a:pPr algn="l">
+              <a:buFont typeface="Arial" panose="020B0604020202020204" pitchFamily="34" charset="0"/>
+              <a:buChar char="•"/>
+            </a:pPr>
+            <a:r>
+              <a:rPr lang="en-US" sz="2400" b="0" i="0" dirty="0">
+                <a:solidFill>
+                  <a:srgbClr val="273540"/>
+                </a:solidFill>
+                <a:effectLst/>
+                <a:latin typeface="Times New Roman" panose="02020603050405020304" pitchFamily="18" charset="0"/>
+                <a:cs typeface="Times New Roman" panose="02020603050405020304" pitchFamily="18" charset="0"/>
+              </a:rPr>
+              <a:t>Explain the concept of a knowledge worker.</a:t>
+            </a:r>
+          </a:p>
+          <a:p>
+            <a:pPr algn="l">
+              <a:buFont typeface="Arial" panose="020B0604020202020204" pitchFamily="34" charset="0"/>
+              <a:buChar char="•"/>
+            </a:pPr>
+            <a:r>
+              <a:rPr lang="en-US" sz="2400" b="0" i="0" dirty="0">
+                <a:solidFill>
+                  <a:srgbClr val="273540"/>
+                </a:solidFill>
+                <a:effectLst/>
+                <a:latin typeface="Times New Roman" panose="02020603050405020304" pitchFamily="18" charset="0"/>
+                <a:cs typeface="Times New Roman" panose="02020603050405020304" pitchFamily="18" charset="0"/>
+              </a:rPr>
+              <a:t>Define and explain nursing informatics and highlight the role of a nurse leader as a knowledge worker.</a:t>
+            </a:r>
+          </a:p>
+          <a:p>
+            <a:pPr algn="l">
+              <a:buFont typeface="Arial" panose="020B0604020202020204" pitchFamily="34" charset="0"/>
+              <a:buChar char="•"/>
+            </a:pPr>
+            <a:r>
+              <a:rPr lang="en-US" sz="2400" b="0" i="0" dirty="0">
+                <a:solidFill>
+                  <a:srgbClr val="273540"/>
+                </a:solidFill>
+                <a:effectLst/>
+                <a:latin typeface="Times New Roman" panose="02020603050405020304" pitchFamily="18" charset="0"/>
+                <a:cs typeface="Times New Roman" panose="02020603050405020304" pitchFamily="18" charset="0"/>
+              </a:rPr>
+              <a:t>Include one slide that visually represents the role of a nurse leader as knowledge worker.</a:t>
+            </a:r>
+          </a:p>
+          <a:p>
+            <a:pPr algn="l">
+              <a:buFont typeface="Arial" panose="020B0604020202020204" pitchFamily="34" charset="0"/>
+              <a:buChar char="•"/>
+            </a:pPr>
+            <a:r>
+              <a:rPr lang="en-US" sz="2400" b="0" i="0" dirty="0">
+                <a:solidFill>
+                  <a:srgbClr val="273540"/>
+                </a:solidFill>
+                <a:effectLst/>
+                <a:latin typeface="Times New Roman" panose="02020603050405020304" pitchFamily="18" charset="0"/>
+                <a:cs typeface="Times New Roman" panose="02020603050405020304" pitchFamily="18" charset="0"/>
+              </a:rPr>
+              <a:t>Your PowerPoint should Include the hypothetical scenario you originally shared in the Discussion Forum. Include your examination of the data that you could use, how the data might be accessed/collected, and what knowledge might be derived from that data. Be sure to incorporate feedback received from your colleagues’ responses.</a:t>
+            </a:r>
+          </a:p>
+          <a:p>
+            <a:endParaRPr lang="en-US" dirty="0"/>
+          </a:p>
+        </p:txBody>
+      </p:sp>
+    </p:spTree>
+    <p:extLst>
+      <p:ext uri="{BB962C8B-B14F-4D97-AF65-F5344CB8AC3E}">
+        <p14:creationId xmlns:p14="http://schemas.microsoft.com/office/powerpoint/2010/main" val="2869444393"/>
+      </p:ext>
+    </p:extLst>
+  </p:cSld>
+  <p:clrMapOvr>
+    <a:masterClrMapping/>
+  </p:clrMapOvr>
+</p:sld>
+</file>
+
+<file path=ppt/slides/slide3.xml><?xml version="1.0" encoding="utf-8"?>
 <p:sld xmlns:a="http://schemas.openxmlformats.org/drawingml/2006/main" xmlns:r="http://schemas.openxmlformats.org/officeDocument/2006/relationships" xmlns:p="http://schemas.openxmlformats.org/presentationml/2006/main">
   <p:cSld>
     <p:bg>
@@ -16806,7 +17497,7 @@
 </p:sld>
 </file>
 
-<file path=ppt/slides/slide3.xml><?xml version="1.0" encoding="utf-8"?>
+<file path=ppt/slides/slide4.xml><?xml version="1.0" encoding="utf-8"?>
 <p:sld xmlns:a="http://schemas.openxmlformats.org/drawingml/2006/main" xmlns:r="http://schemas.openxmlformats.org/officeDocument/2006/relationships" xmlns:p="http://schemas.openxmlformats.org/presentationml/2006/main">
   <p:cSld>
     <p:bg>
@@ -16997,7 +17688,7 @@
 </p:sld>
 </file>
 
-<file path=ppt/slides/slide4.xml><?xml version="1.0" encoding="utf-8"?>
+<file path=ppt/slides/slide5.xml><?xml version="1.0" encoding="utf-8"?>
 <p:sld xmlns:a="http://schemas.openxmlformats.org/drawingml/2006/main" xmlns:r="http://schemas.openxmlformats.org/officeDocument/2006/relationships" xmlns:p="http://schemas.openxmlformats.org/presentationml/2006/main">
   <p:cSld>
     <p:bg>
@@ -17188,7 +17879,7 @@
 </p:sld>
 </file>
 
-<file path=ppt/slides/slide5.xml><?xml version="1.0" encoding="utf-8"?>
+<file path=ppt/slides/slide6.xml><?xml version="1.0" encoding="utf-8"?>
 <p:sld xmlns:a="http://schemas.openxmlformats.org/drawingml/2006/main" xmlns:r="http://schemas.openxmlformats.org/officeDocument/2006/relationships" xmlns:p="http://schemas.openxmlformats.org/presentationml/2006/main">
   <p:cSld>
     <p:spTree>
@@ -17299,7 +17990,7 @@
 </p:sld>
 </file>
 
-<file path=ppt/slides/slide6.xml><?xml version="1.0" encoding="utf-8"?>
+<file path=ppt/slides/slide7.xml><?xml version="1.0" encoding="utf-8"?>
 <p:sld xmlns:a="http://schemas.openxmlformats.org/drawingml/2006/main" xmlns:r="http://schemas.openxmlformats.org/officeDocument/2006/relationships" xmlns:p="http://schemas.openxmlformats.org/presentationml/2006/main">
   <p:cSld>
     <p:bg>
@@ -18176,7 +18867,7 @@
 </p:sld>
 </file>
 
-<file path=ppt/slides/slide7.xml><?xml version="1.0" encoding="utf-8"?>
+<file path=ppt/slides/slide8.xml><?xml version="1.0" encoding="utf-8"?>
 <p:sld xmlns:a="http://schemas.openxmlformats.org/drawingml/2006/main" xmlns:r="http://schemas.openxmlformats.org/officeDocument/2006/relationships" xmlns:p="http://schemas.openxmlformats.org/presentationml/2006/main">
   <p:cSld>
     <p:bg>
@@ -18931,7 +19622,7 @@
 </p:sld>
 </file>
 
-<file path=ppt/slides/slide8.xml><?xml version="1.0" encoding="utf-8"?>
+<file path=ppt/slides/slide9.xml><?xml version="1.0" encoding="utf-8"?>
 <p:sld xmlns:a="http://schemas.openxmlformats.org/drawingml/2006/main" xmlns:r="http://schemas.openxmlformats.org/officeDocument/2006/relationships" xmlns:p="http://schemas.openxmlformats.org/presentationml/2006/main">
   <p:cSld>
     <p:bg>
@@ -19647,526 +20338,6 @@
     <p:extLst>
       <p:ext uri="{BB962C8B-B14F-4D97-AF65-F5344CB8AC3E}">
         <p14:creationId xmlns:p14="http://schemas.microsoft.com/office/powerpoint/2010/main" val="2686786285"/>
-      </p:ext>
-    </p:extLst>
-  </p:cSld>
-  <p:clrMapOvr>
-    <a:masterClrMapping/>
-  </p:clrMapOvr>
-</p:sld>
-</file>
-
-<file path=ppt/slides/slide9.xml><?xml version="1.0" encoding="utf-8"?>
-<p:sld xmlns:a="http://schemas.openxmlformats.org/drawingml/2006/main" xmlns:r="http://schemas.openxmlformats.org/officeDocument/2006/relationships" xmlns:p="http://schemas.openxmlformats.org/presentationml/2006/main">
-  <p:cSld>
-    <p:bg>
-      <p:bgPr>
-        <a:solidFill>
-          <a:schemeClr val="bg1"/>
-        </a:solidFill>
-        <a:effectLst/>
-      </p:bgPr>
-    </p:bg>
-    <p:spTree>
-      <p:nvGrpSpPr>
-        <p:cNvPr id="1" name=""/>
-        <p:cNvGrpSpPr/>
-        <p:nvPr/>
-      </p:nvGrpSpPr>
-      <p:grpSpPr>
-        <a:xfrm>
-          <a:off x="0" y="0"/>
-          <a:ext cx="0" cy="0"/>
-          <a:chOff x="0" y="0"/>
-          <a:chExt cx="0" cy="0"/>
-        </a:xfrm>
-      </p:grpSpPr>
-      <p:sp>
-        <p:nvSpPr>
-          <p:cNvPr id="8" name="Rectangle 7">
-            <a:extLst>
-              <a:ext uri="{FF2B5EF4-FFF2-40B4-BE49-F238E27FC236}">
-                <a16:creationId xmlns:a16="http://schemas.microsoft.com/office/drawing/2014/main" id="{DE7FFD28-545C-4C88-A2E7-152FB234C92C}"/>
-              </a:ext>
-              <a:ext uri="{C183D7F6-B498-43B3-948B-1728B52AA6E4}">
-                <adec:decorative xmlns:adec="http://schemas.microsoft.com/office/drawing/2017/decorative" val="1"/>
-              </a:ext>
-            </a:extLst>
-          </p:cNvPr>
-          <p:cNvSpPr>
-            <a:spLocks noGrp="1" noRot="1" noChangeAspect="1" noMove="1" noResize="1" noEditPoints="1" noAdjustHandles="1" noChangeArrowheads="1" noChangeShapeType="1" noTextEdit="1"/>
-          </p:cNvSpPr>
-          <p:nvPr>
-            <p:extLst>
-              <p:ext uri="{386F3935-93C4-4BCD-93E2-E3B085C9AB24}">
-                <p16:designElem xmlns:p16="http://schemas.microsoft.com/office/powerpoint/2015/main" val="1"/>
-              </p:ext>
-            </p:extLst>
-          </p:nvPr>
-        </p:nvSpPr>
-        <p:spPr>
-          <a:xfrm>
-            <a:off x="546100" y="349250"/>
-            <a:ext cx="11099800" cy="1803400"/>
-          </a:xfrm>
-          <a:prstGeom prst="rect">
-            <a:avLst/>
-          </a:prstGeom>
-          <a:solidFill>
-            <a:schemeClr val="accent5"/>
-          </a:solidFill>
-          <a:ln>
-            <a:noFill/>
-          </a:ln>
-        </p:spPr>
-        <p:style>
-          <a:lnRef idx="2">
-            <a:schemeClr val="accent1">
-              <a:shade val="50000"/>
-            </a:schemeClr>
-          </a:lnRef>
-          <a:fillRef idx="1">
-            <a:schemeClr val="accent1"/>
-          </a:fillRef>
-          <a:effectRef idx="0">
-            <a:schemeClr val="accent1"/>
-          </a:effectRef>
-          <a:fontRef idx="minor">
-            <a:schemeClr val="lt1"/>
-          </a:fontRef>
-        </p:style>
-        <p:txBody>
-          <a:bodyPr rtlCol="0" anchor="ctr"/>
-          <a:lstStyle/>
-          <a:p>
-            <a:pPr algn="ctr"/>
-            <a:endParaRPr lang="en-US"/>
-          </a:p>
-        </p:txBody>
-      </p:sp>
-      <p:sp>
-        <p:nvSpPr>
-          <p:cNvPr id="2" name="Title 1">
-            <a:extLst>
-              <a:ext uri="{FF2B5EF4-FFF2-40B4-BE49-F238E27FC236}">
-                <a16:creationId xmlns:a16="http://schemas.microsoft.com/office/drawing/2014/main" id="{7F593DFB-F021-EB02-8B06-56A4CCD29D6E}"/>
-              </a:ext>
-            </a:extLst>
-          </p:cNvPr>
-          <p:cNvSpPr>
-            <a:spLocks noGrp="1"/>
-          </p:cNvSpPr>
-          <p:nvPr>
-            <p:ph type="title"/>
-          </p:nvPr>
-        </p:nvSpPr>
-        <p:spPr>
-          <a:xfrm>
-            <a:off x="838200" y="588168"/>
-            <a:ext cx="10515600" cy="1325563"/>
-          </a:xfrm>
-        </p:spPr>
-        <p:txBody>
-          <a:bodyPr>
-            <a:normAutofit/>
-          </a:bodyPr>
-          <a:lstStyle/>
-          <a:p>
-            <a:pPr algn="ctr"/>
-            <a:r>
-              <a:rPr lang="en-US" sz="4600">
-                <a:solidFill>
-                  <a:srgbClr val="FFFFFF"/>
-                </a:solidFill>
-              </a:rPr>
-              <a:t>References</a:t>
-            </a:r>
-          </a:p>
-        </p:txBody>
-      </p:sp>
-      <p:sp>
-        <p:nvSpPr>
-          <p:cNvPr id="3" name="Content Placeholder 2">
-            <a:extLst>
-              <a:ext uri="{FF2B5EF4-FFF2-40B4-BE49-F238E27FC236}">
-                <a16:creationId xmlns:a16="http://schemas.microsoft.com/office/drawing/2014/main" id="{2A07DAD5-20DD-D02F-7EE5-A8A3B3267B52}"/>
-              </a:ext>
-            </a:extLst>
-          </p:cNvPr>
-          <p:cNvSpPr>
-            <a:spLocks noGrp="1"/>
-          </p:cNvSpPr>
-          <p:nvPr>
-            <p:ph idx="1"/>
-          </p:nvPr>
-        </p:nvSpPr>
-        <p:spPr>
-          <a:xfrm>
-            <a:off x="838200" y="2391568"/>
-            <a:ext cx="11099800" cy="4466432"/>
-          </a:xfrm>
-        </p:spPr>
-        <p:txBody>
-          <a:bodyPr anchor="ctr">
-            <a:normAutofit/>
-          </a:bodyPr>
-          <a:lstStyle/>
-          <a:p>
-            <a:pPr marL="0" marR="0" indent="0">
-              <a:spcBef>
-                <a:spcPts val="0"/>
-              </a:spcBef>
-              <a:spcAft>
-                <a:spcPts val="0"/>
-              </a:spcAft>
-              <a:buNone/>
-            </a:pPr>
-            <a:r>
-              <a:rPr lang="en-US" sz="1300" dirty="0">
-                <a:effectLst/>
-                <a:latin typeface="Times New Roman" panose="02020603050405020304" pitchFamily="18" charset="0"/>
-                <a:ea typeface="Calibri" panose="020F0502020204030204" pitchFamily="34" charset="0"/>
-                <a:cs typeface="Times New Roman" panose="02020603050405020304" pitchFamily="18" charset="0"/>
-              </a:rPr>
-              <a:t>Admin. (2022, June 29). </a:t>
-            </a:r>
-            <a:r>
-              <a:rPr lang="en-US" sz="1300" i="1" dirty="0">
-                <a:effectLst/>
-                <a:latin typeface="Times New Roman" panose="02020603050405020304" pitchFamily="18" charset="0"/>
-                <a:ea typeface="Calibri" panose="020F0502020204030204" pitchFamily="34" charset="0"/>
-                <a:cs typeface="Times New Roman" panose="02020603050405020304" pitchFamily="18" charset="0"/>
-              </a:rPr>
-              <a:t>What is Nursing Informatics?</a:t>
-            </a:r>
-            <a:r>
-              <a:rPr lang="en-US" sz="1300" dirty="0">
-                <a:effectLst/>
-                <a:latin typeface="Times New Roman" panose="02020603050405020304" pitchFamily="18" charset="0"/>
-                <a:ea typeface="Calibri" panose="020F0502020204030204" pitchFamily="34" charset="0"/>
-                <a:cs typeface="Times New Roman" panose="02020603050405020304" pitchFamily="18" charset="0"/>
-              </a:rPr>
-              <a:t> HIMSS. Retrieved December 11, 2022, from </a:t>
-            </a:r>
-            <a:r>
-              <a:rPr lang="en-US" sz="1300" u="sng" dirty="0">
-                <a:effectLst/>
-                <a:latin typeface="Times New Roman" panose="02020603050405020304" pitchFamily="18" charset="0"/>
-                <a:ea typeface="Calibri" panose="020F0502020204030204" pitchFamily="34" charset="0"/>
-                <a:cs typeface="Times New Roman" panose="02020603050405020304" pitchFamily="18" charset="0"/>
-                <a:hlinkClick r:id="rId2"/>
-              </a:rPr>
-              <a:t>https://www.himss.org/resources/what-nursing-informatics</a:t>
-            </a:r>
-            <a:endParaRPr lang="en-US" sz="1300" u="sng" dirty="0">
-              <a:effectLst/>
-              <a:latin typeface="Times New Roman" panose="02020603050405020304" pitchFamily="18" charset="0"/>
-              <a:ea typeface="Calibri" panose="020F0502020204030204" pitchFamily="34" charset="0"/>
-              <a:cs typeface="Times New Roman" panose="02020603050405020304" pitchFamily="18" charset="0"/>
-            </a:endParaRPr>
-          </a:p>
-          <a:p>
-            <a:pPr marL="0" marR="0" indent="0">
-              <a:spcBef>
-                <a:spcPts val="0"/>
-              </a:spcBef>
-              <a:spcAft>
-                <a:spcPts val="0"/>
-              </a:spcAft>
-              <a:buNone/>
-            </a:pPr>
-            <a:endParaRPr lang="en-US" sz="1300" u="sng" dirty="0">
-              <a:effectLst/>
-              <a:latin typeface="Times New Roman" panose="02020603050405020304" pitchFamily="18" charset="0"/>
-              <a:ea typeface="Calibri" panose="020F0502020204030204" pitchFamily="34" charset="0"/>
-              <a:cs typeface="Times New Roman" panose="02020603050405020304" pitchFamily="18" charset="0"/>
-            </a:endParaRPr>
-          </a:p>
-          <a:p>
-            <a:pPr marL="0" marR="0" indent="0">
-              <a:spcBef>
-                <a:spcPts val="0"/>
-              </a:spcBef>
-              <a:spcAft>
-                <a:spcPts val="0"/>
-              </a:spcAft>
-              <a:buNone/>
-            </a:pPr>
-            <a:endParaRPr lang="en-US" sz="1300" dirty="0">
-              <a:effectLst/>
-              <a:latin typeface="Calibri" panose="020F0502020204030204" pitchFamily="34" charset="0"/>
-              <a:ea typeface="Calibri" panose="020F0502020204030204" pitchFamily="34" charset="0"/>
-              <a:cs typeface="Times New Roman" panose="02020603050405020304" pitchFamily="18" charset="0"/>
-            </a:endParaRPr>
-          </a:p>
-          <a:p>
-            <a:pPr marL="0" marR="0" indent="0">
-              <a:spcBef>
-                <a:spcPts val="0"/>
-              </a:spcBef>
-              <a:spcAft>
-                <a:spcPts val="0"/>
-              </a:spcAft>
-              <a:buNone/>
-            </a:pPr>
-            <a:r>
-              <a:rPr lang="en-US" sz="1300" dirty="0">
-                <a:effectLst/>
-                <a:latin typeface="Times New Roman" panose="02020603050405020304" pitchFamily="18" charset="0"/>
-                <a:ea typeface="Calibri" panose="020F0502020204030204" pitchFamily="34" charset="0"/>
-                <a:cs typeface="Times New Roman" panose="02020603050405020304" pitchFamily="18" charset="0"/>
-              </a:rPr>
-              <a:t>American Nurses Association. (2001). Scope and Standards of Nursing Informatics Practice. Washington, DC: American Nurses Publishing.</a:t>
-            </a:r>
-          </a:p>
-          <a:p>
-            <a:pPr marL="0" marR="0" indent="0">
-              <a:spcBef>
-                <a:spcPts val="0"/>
-              </a:spcBef>
-              <a:spcAft>
-                <a:spcPts val="0"/>
-              </a:spcAft>
-              <a:buNone/>
-            </a:pPr>
-            <a:endParaRPr lang="en-US" sz="1300" dirty="0">
-              <a:effectLst/>
-              <a:latin typeface="Calibri" panose="020F0502020204030204" pitchFamily="34" charset="0"/>
-              <a:ea typeface="Calibri" panose="020F0502020204030204" pitchFamily="34" charset="0"/>
-              <a:cs typeface="Times New Roman" panose="02020603050405020304" pitchFamily="18" charset="0"/>
-            </a:endParaRPr>
-          </a:p>
-          <a:p>
-            <a:pPr marL="0" marR="0" indent="0">
-              <a:buNone/>
-            </a:pPr>
-            <a:r>
-              <a:rPr lang="en-US" sz="1300" dirty="0" err="1">
-                <a:effectLst/>
-                <a:latin typeface="Times New Roman" panose="02020603050405020304" pitchFamily="18" charset="0"/>
-                <a:ea typeface="Times New Roman" panose="02020603050405020304" pitchFamily="18" charset="0"/>
-              </a:rPr>
-              <a:t>Conrrad</a:t>
-            </a:r>
-            <a:r>
-              <a:rPr lang="en-US" sz="1300" dirty="0">
-                <a:effectLst/>
-                <a:latin typeface="Times New Roman" panose="02020603050405020304" pitchFamily="18" charset="0"/>
-                <a:ea typeface="Times New Roman" panose="02020603050405020304" pitchFamily="18" charset="0"/>
-              </a:rPr>
-              <a:t>, S., &amp; Sherrod, D. (n.d.). </a:t>
-            </a:r>
-            <a:r>
-              <a:rPr lang="en-US" sz="1300" i="1" dirty="0">
-                <a:effectLst/>
-                <a:latin typeface="Times New Roman" panose="02020603050405020304" pitchFamily="18" charset="0"/>
-                <a:ea typeface="Times New Roman" panose="02020603050405020304" pitchFamily="18" charset="0"/>
-              </a:rPr>
-              <a:t>Nurse managers as Knowledge Workers : Nursing Management</a:t>
-            </a:r>
-            <a:r>
-              <a:rPr lang="en-US" sz="1300" dirty="0">
-                <a:effectLst/>
-                <a:latin typeface="Times New Roman" panose="02020603050405020304" pitchFamily="18" charset="0"/>
-                <a:ea typeface="Times New Roman" panose="02020603050405020304" pitchFamily="18" charset="0"/>
-              </a:rPr>
-              <a:t>. Nurse managers as knowledge worker. Retrieved December 8, 2022, from   </a:t>
-            </a:r>
-            <a:r>
-              <a:rPr lang="en-US" sz="1300" u="sng" dirty="0">
-                <a:effectLst/>
-                <a:latin typeface="Times New Roman" panose="02020603050405020304" pitchFamily="18" charset="0"/>
-                <a:ea typeface="Times New Roman" panose="02020603050405020304" pitchFamily="18" charset="0"/>
-                <a:hlinkClick r:id="rId3"/>
-              </a:rPr>
-              <a:t>https://journals.lww.com/nursingmanagement/fulltext/2011/02000/Nurse_managers_as_knowledge_workers.14.aspx</a:t>
-            </a:r>
-            <a:r>
-              <a:rPr lang="en-US" sz="1300" dirty="0">
-                <a:effectLst/>
-                <a:latin typeface="Times New Roman" panose="02020603050405020304" pitchFamily="18" charset="0"/>
-                <a:ea typeface="Times New Roman" panose="02020603050405020304" pitchFamily="18" charset="0"/>
-              </a:rPr>
-              <a:t> </a:t>
-            </a:r>
-          </a:p>
-          <a:p>
-            <a:pPr marL="0" marR="0" indent="0">
-              <a:spcBef>
-                <a:spcPts val="0"/>
-              </a:spcBef>
-              <a:spcAft>
-                <a:spcPts val="0"/>
-              </a:spcAft>
-              <a:buNone/>
-            </a:pPr>
-            <a:endParaRPr lang="en-US" sz="1300" dirty="0">
-              <a:effectLst/>
-              <a:latin typeface="Calibri" panose="020F0502020204030204" pitchFamily="34" charset="0"/>
-              <a:ea typeface="Calibri" panose="020F0502020204030204" pitchFamily="34" charset="0"/>
-              <a:cs typeface="Times New Roman" panose="02020603050405020304" pitchFamily="18" charset="0"/>
-            </a:endParaRPr>
-          </a:p>
-          <a:p>
-            <a:pPr marL="0" marR="0" indent="0">
-              <a:buNone/>
-            </a:pPr>
-            <a:r>
-              <a:rPr lang="en-US" sz="1300" i="1" dirty="0">
-                <a:effectLst/>
-                <a:latin typeface="Times New Roman" panose="02020603050405020304" pitchFamily="18" charset="0"/>
-                <a:ea typeface="Times New Roman" panose="02020603050405020304" pitchFamily="18" charset="0"/>
-              </a:rPr>
-              <a:t>How nursing informatics benefits quality outcomes</a:t>
-            </a:r>
-            <a:r>
-              <a:rPr lang="en-US" sz="1300" dirty="0">
-                <a:effectLst/>
-                <a:latin typeface="Times New Roman" panose="02020603050405020304" pitchFamily="18" charset="0"/>
-                <a:ea typeface="Times New Roman" panose="02020603050405020304" pitchFamily="18" charset="0"/>
-              </a:rPr>
-              <a:t>. Default. (2021, April 1). Retrieved December 8, 2022, from </a:t>
-            </a:r>
-            <a:r>
-              <a:rPr lang="en-US" sz="1300" u="sng" dirty="0">
-                <a:effectLst/>
-                <a:latin typeface="Times New Roman" panose="02020603050405020304" pitchFamily="18" charset="0"/>
-                <a:ea typeface="Times New Roman" panose="02020603050405020304" pitchFamily="18" charset="0"/>
-                <a:hlinkClick r:id="rId4"/>
-              </a:rPr>
-              <a:t>https://www.healthstream.com/resource/blog/how-nursing-informatics-benefits-quality-outcomes</a:t>
-            </a:r>
-            <a:r>
-              <a:rPr lang="en-US" sz="1300" dirty="0">
-                <a:effectLst/>
-                <a:latin typeface="Times New Roman" panose="02020603050405020304" pitchFamily="18" charset="0"/>
-                <a:ea typeface="Times New Roman" panose="02020603050405020304" pitchFamily="18" charset="0"/>
-              </a:rPr>
-              <a:t>  </a:t>
-            </a:r>
-          </a:p>
-          <a:p>
-            <a:pPr marL="0" marR="0" indent="0">
-              <a:buNone/>
-            </a:pPr>
-            <a:endParaRPr lang="en-US" sz="1300" dirty="0">
-              <a:effectLst/>
-              <a:latin typeface="Times New Roman" panose="02020603050405020304" pitchFamily="18" charset="0"/>
-              <a:ea typeface="Times New Roman" panose="02020603050405020304" pitchFamily="18" charset="0"/>
-            </a:endParaRPr>
-          </a:p>
-          <a:p>
-            <a:pPr marL="0" marR="0" indent="0">
-              <a:buNone/>
-            </a:pPr>
-            <a:r>
-              <a:rPr lang="en-US" sz="1300" dirty="0">
-                <a:effectLst/>
-                <a:latin typeface="Times New Roman" panose="02020603050405020304" pitchFamily="18" charset="0"/>
-                <a:ea typeface="Times New Roman" panose="02020603050405020304" pitchFamily="18" charset="0"/>
-              </a:rPr>
-              <a:t>McGonigle, D., &amp; Mastrian, K. (2022). Nursing Science an of Knowledge. In </a:t>
-            </a:r>
-            <a:r>
-              <a:rPr lang="en-US" sz="1300" i="1" dirty="0">
-                <a:effectLst/>
-                <a:latin typeface="Times New Roman" panose="02020603050405020304" pitchFamily="18" charset="0"/>
-                <a:ea typeface="Times New Roman" panose="02020603050405020304" pitchFamily="18" charset="0"/>
-              </a:rPr>
-              <a:t>Nursing Informatics and the foundation of knowledge</a:t>
-            </a:r>
-            <a:r>
-              <a:rPr lang="en-US" sz="1300" dirty="0">
-                <a:effectLst/>
-                <a:latin typeface="Times New Roman" panose="02020603050405020304" pitchFamily="18" charset="0"/>
-                <a:ea typeface="Times New Roman" panose="02020603050405020304" pitchFamily="18" charset="0"/>
-              </a:rPr>
-              <a:t> (pp. 15–16). essay, Jones &amp; Bartlett Learning. </a:t>
-            </a:r>
-          </a:p>
-          <a:p>
-            <a:pPr marL="0" marR="0" indent="0">
-              <a:buNone/>
-            </a:pPr>
-            <a:endParaRPr lang="en-US" sz="1300" dirty="0">
-              <a:effectLst/>
-              <a:latin typeface="Times New Roman" panose="02020603050405020304" pitchFamily="18" charset="0"/>
-              <a:ea typeface="Times New Roman" panose="02020603050405020304" pitchFamily="18" charset="0"/>
-            </a:endParaRPr>
-          </a:p>
-          <a:p>
-            <a:pPr marL="0" marR="0" indent="0">
-              <a:buNone/>
-            </a:pPr>
-            <a:r>
-              <a:rPr lang="en-US" sz="1300" dirty="0">
-                <a:effectLst/>
-                <a:latin typeface="Times New Roman" panose="02020603050405020304" pitchFamily="18" charset="0"/>
-                <a:ea typeface="Times New Roman" panose="02020603050405020304" pitchFamily="18" charset="0"/>
-              </a:rPr>
-              <a:t> Sweeney, </a:t>
-            </a:r>
-            <a:r>
-              <a:rPr lang="en-US" sz="1300" dirty="0" err="1">
-                <a:effectLst/>
-                <a:latin typeface="Times New Roman" panose="02020603050405020304" pitchFamily="18" charset="0"/>
-                <a:ea typeface="Times New Roman" panose="02020603050405020304" pitchFamily="18" charset="0"/>
-              </a:rPr>
-              <a:t>julianne</a:t>
-            </a:r>
-            <a:r>
-              <a:rPr lang="en-US" sz="1300" dirty="0">
-                <a:effectLst/>
-                <a:latin typeface="Times New Roman" panose="02020603050405020304" pitchFamily="18" charset="0"/>
-                <a:ea typeface="Times New Roman" panose="02020603050405020304" pitchFamily="18" charset="0"/>
-              </a:rPr>
-              <a:t>. (2017). </a:t>
-            </a:r>
-            <a:r>
-              <a:rPr lang="en-US" sz="1300" i="1" dirty="0">
-                <a:effectLst/>
-                <a:latin typeface="Times New Roman" panose="02020603050405020304" pitchFamily="18" charset="0"/>
-                <a:ea typeface="Times New Roman" panose="02020603050405020304" pitchFamily="18" charset="0"/>
-              </a:rPr>
-              <a:t>Healthcare Informatics</a:t>
-            </a:r>
-            <a:r>
-              <a:rPr lang="en-US" sz="1300" dirty="0">
-                <a:effectLst/>
-                <a:latin typeface="Times New Roman" panose="02020603050405020304" pitchFamily="18" charset="0"/>
-                <a:ea typeface="Times New Roman" panose="02020603050405020304" pitchFamily="18" charset="0"/>
-              </a:rPr>
-              <a:t>. EBSCO Information Services, Inc. | www.ebsco.com. Retrieved December 10, 2022, from </a:t>
-            </a:r>
-          </a:p>
-          <a:p>
-            <a:pPr marL="0" marR="0" indent="0">
-              <a:buNone/>
-            </a:pPr>
-            <a:r>
-              <a:rPr lang="en-US" sz="1300" u="sng" dirty="0">
-                <a:effectLst/>
-                <a:latin typeface="Times New Roman" panose="02020603050405020304" pitchFamily="18" charset="0"/>
-                <a:ea typeface="Times New Roman" panose="02020603050405020304" pitchFamily="18" charset="0"/>
-                <a:hlinkClick r:id="rId5"/>
-              </a:rPr>
-              <a:t>https://www.ebsco.com/products/ebscohost-research-platform</a:t>
-            </a:r>
-            <a:r>
-              <a:rPr lang="en-US" sz="1300" dirty="0">
-                <a:effectLst/>
-                <a:latin typeface="Times New Roman" panose="02020603050405020304" pitchFamily="18" charset="0"/>
-                <a:ea typeface="Times New Roman" panose="02020603050405020304" pitchFamily="18" charset="0"/>
-              </a:rPr>
-              <a:t> </a:t>
-            </a:r>
-          </a:p>
-        </p:txBody>
-      </p:sp>
-    </p:spTree>
-    <p:extLst>
-      <p:ext uri="{BB962C8B-B14F-4D97-AF65-F5344CB8AC3E}">
-        <p14:creationId xmlns:p14="http://schemas.microsoft.com/office/powerpoint/2010/main" val="303130201"/>
       </p:ext>
     </p:extLst>
   </p:cSld>
